--- a/courses/261/influenzaonline.pptx
+++ b/courses/261/influenzaonline.pptx
@@ -5440,8 +5440,8 @@
         </p:nvSpPr>
         <p:spPr>
           <a:xfrm>
-            <a:off x="274320" y="304165"/>
-            <a:ext cx="11917680" cy="1325563"/>
+            <a:off x="1099594" y="657091"/>
+            <a:ext cx="10139423" cy="1325563"/>
           </a:xfrm>
         </p:spPr>
         <p:txBody>
@@ -5453,40 +5453,11 @@
             <a:pPr algn="ctr"/>
             <a:r>
               <a:rPr lang="en-US" dirty="0"/>
-              <a:t>Flu vaccination coverage is not uniform globally</a:t>
-            </a:r>
-          </a:p>
-        </p:txBody>
-      </p:sp>
-      <p:pic>
-        <p:nvPicPr>
-          <p:cNvPr id="6" name="Content Placeholder 5">
-            <a:extLst>
-              <a:ext uri="{FF2B5EF4-FFF2-40B4-BE49-F238E27FC236}">
-                <a16:creationId xmlns:a16="http://schemas.microsoft.com/office/drawing/2014/main" id="{57D86811-B427-412C-BC1C-70C3A08B6DFD}"/>
-              </a:ext>
-            </a:extLst>
-          </p:cNvPr>
-          <p:cNvPicPr>
-            <a:picLocks noGrp="1" noChangeAspect="1"/>
-          </p:cNvPicPr>
-          <p:nvPr>
-            <p:ph idx="1"/>
-          </p:nvPr>
-        </p:nvPicPr>
-        <p:blipFill>
-          <a:blip r:embed="rId3"/>
-          <a:stretch>
-            <a:fillRect/>
-          </a:stretch>
-        </p:blipFill>
-        <p:spPr>
-          <a:xfrm>
-            <a:off x="5948811" y="1629728"/>
-            <a:ext cx="5896012" cy="4351338"/>
-          </a:xfrm>
-        </p:spPr>
-      </p:pic>
+              <a:t>Flu vaccinations are not uniformly available globally</a:t>
+            </a:r>
+          </a:p>
+        </p:txBody>
+      </p:sp>
       <p:sp>
         <p:nvSpPr>
           <p:cNvPr id="4" name="Content Placeholder 2">
@@ -5503,8 +5474,8 @@
         </p:nvSpPr>
         <p:spPr>
           <a:xfrm>
-            <a:off x="502920" y="1629727"/>
-            <a:ext cx="4531924" cy="4924107"/>
+            <a:off x="502920" y="1982654"/>
+            <a:ext cx="4531924" cy="4571180"/>
           </a:xfrm>
           <a:prstGeom prst="rect">
             <a:avLst/>
@@ -5681,17 +5652,1685 @@
           <a:p>
             <a:r>
               <a:rPr lang="en-US" dirty="0"/>
-              <a:t>Green indicates vaccines made available through public health funding at low or no cost to public.</a:t>
+              <a:t>Flu vaccines made available through public health funding at low or no cost to public in some but not all countries</a:t>
             </a:r>
           </a:p>
           <a:p>
             <a:r>
               <a:rPr lang="en-US" dirty="0"/>
-              <a:t>Yellow indicates vaccines available only thru private doctors, often at higher cost than vaccines provided to the public coverage</a:t>
-            </a:r>
-          </a:p>
-        </p:txBody>
-      </p:sp>
+              <a:t>Some countries make it available only thru private doctors, often at higher cost than vaccines provided to the public coverage</a:t>
+            </a:r>
+          </a:p>
+        </p:txBody>
+      </p:sp>
+      <p:graphicFrame>
+        <p:nvGraphicFramePr>
+          <p:cNvPr id="7" name="Content Placeholder 6">
+            <a:extLst>
+              <a:ext uri="{FF2B5EF4-FFF2-40B4-BE49-F238E27FC236}">
+                <a16:creationId xmlns:a16="http://schemas.microsoft.com/office/drawing/2014/main" id="{1AEC2F01-1333-2679-D898-89CE6B4B4087}"/>
+              </a:ext>
+            </a:extLst>
+          </p:cNvPr>
+          <p:cNvGraphicFramePr>
+            <a:graphicFrameLocks noGrp="1"/>
+          </p:cNvGraphicFramePr>
+          <p:nvPr>
+            <p:ph idx="1"/>
+            <p:extLst>
+              <p:ext uri="{D42A27DB-BD31-4B8C-83A1-F6EECF244321}">
+                <p14:modId xmlns:p14="http://schemas.microsoft.com/office/powerpoint/2010/main" val="358983847"/>
+              </p:ext>
+            </p:extLst>
+          </p:nvPr>
+        </p:nvGraphicFramePr>
+        <p:xfrm>
+          <a:off x="5491827" y="2533347"/>
+          <a:ext cx="6366872" cy="2324904"/>
+        </p:xfrm>
+        <a:graphic>
+          <a:graphicData uri="http://schemas.openxmlformats.org/drawingml/2006/table">
+            <a:tbl>
+              <a:tblPr>
+                <a:tableStyleId>{5C22544A-7EE6-4342-B048-85BDC9FD1C3A}</a:tableStyleId>
+              </a:tblPr>
+              <a:tblGrid>
+                <a:gridCol w="1752152">
+                  <a:extLst>
+                    <a:ext uri="{9D8B030D-6E8A-4147-A177-3AD203B41FA5}">
+                      <a16:colId xmlns:a16="http://schemas.microsoft.com/office/drawing/2014/main" val="648757929"/>
+                    </a:ext>
+                  </a:extLst>
+                </a:gridCol>
+                <a:gridCol w="497712">
+                  <a:extLst>
+                    <a:ext uri="{9D8B030D-6E8A-4147-A177-3AD203B41FA5}">
+                      <a16:colId xmlns:a16="http://schemas.microsoft.com/office/drawing/2014/main" val="3540354049"/>
+                    </a:ext>
+                  </a:extLst>
+                </a:gridCol>
+                <a:gridCol w="601883">
+                  <a:extLst>
+                    <a:ext uri="{9D8B030D-6E8A-4147-A177-3AD203B41FA5}">
+                      <a16:colId xmlns:a16="http://schemas.microsoft.com/office/drawing/2014/main" val="2424048795"/>
+                    </a:ext>
+                  </a:extLst>
+                </a:gridCol>
+                <a:gridCol w="625033">
+                  <a:extLst>
+                    <a:ext uri="{9D8B030D-6E8A-4147-A177-3AD203B41FA5}">
+                      <a16:colId xmlns:a16="http://schemas.microsoft.com/office/drawing/2014/main" val="3886501801"/>
+                    </a:ext>
+                  </a:extLst>
+                </a:gridCol>
+                <a:gridCol w="682907">
+                  <a:extLst>
+                    <a:ext uri="{9D8B030D-6E8A-4147-A177-3AD203B41FA5}">
+                      <a16:colId xmlns:a16="http://schemas.microsoft.com/office/drawing/2014/main" val="550090745"/>
+                    </a:ext>
+                  </a:extLst>
+                </a:gridCol>
+                <a:gridCol w="648182">
+                  <a:extLst>
+                    <a:ext uri="{9D8B030D-6E8A-4147-A177-3AD203B41FA5}">
+                      <a16:colId xmlns:a16="http://schemas.microsoft.com/office/drawing/2014/main" val="2465693754"/>
+                    </a:ext>
+                  </a:extLst>
+                </a:gridCol>
+                <a:gridCol w="601883">
+                  <a:extLst>
+                    <a:ext uri="{9D8B030D-6E8A-4147-A177-3AD203B41FA5}">
+                      <a16:colId xmlns:a16="http://schemas.microsoft.com/office/drawing/2014/main" val="2133003502"/>
+                    </a:ext>
+                  </a:extLst>
+                </a:gridCol>
+                <a:gridCol w="957120">
+                  <a:extLst>
+                    <a:ext uri="{9D8B030D-6E8A-4147-A177-3AD203B41FA5}">
+                      <a16:colId xmlns:a16="http://schemas.microsoft.com/office/drawing/2014/main" val="2377989991"/>
+                    </a:ext>
+                  </a:extLst>
+                </a:gridCol>
+              </a:tblGrid>
+              <a:tr h="182364">
+                <a:tc>
+                  <a:txBody>
+                    <a:bodyPr/>
+                    <a:lstStyle/>
+                    <a:p>
+                      <a:pPr algn="ctr" fontAlgn="ctr">
+                        <a:buNone/>
+                      </a:pPr>
+                      <a:r>
+                        <a:rPr lang="en-US" sz="1600" b="1" u="none" strike="noStrike" dirty="0">
+                          <a:effectLst/>
+                        </a:rPr>
+                        <a:t>Vaccine-preventable disease</a:t>
+                      </a:r>
+                      <a:endParaRPr lang="en-US" sz="1600" b="1" i="0" u="none" strike="noStrike" dirty="0">
+                        <a:solidFill>
+                          <a:srgbClr val="FFFFFF"/>
+                        </a:solidFill>
+                        <a:effectLst/>
+                        <a:latin typeface="Carlito"/>
+                      </a:endParaRPr>
+                    </a:p>
+                  </a:txBody>
+                  <a:tcPr marL="3537" marR="3537" marT="3537" marB="0" anchor="ctr"/>
+                </a:tc>
+                <a:tc>
+                  <a:txBody>
+                    <a:bodyPr/>
+                    <a:lstStyle/>
+                    <a:p>
+                      <a:pPr algn="ctr" fontAlgn="ctr">
+                        <a:buNone/>
+                      </a:pPr>
+                      <a:r>
+                        <a:rPr lang="en-US" sz="1600" b="1" u="none" strike="noStrike" dirty="0">
+                          <a:effectLst/>
+                        </a:rPr>
+                        <a:t>China</a:t>
+                      </a:r>
+                      <a:endParaRPr lang="en-US" sz="1600" b="1" i="0" u="none" strike="noStrike" dirty="0">
+                        <a:solidFill>
+                          <a:srgbClr val="FFFFFF"/>
+                        </a:solidFill>
+                        <a:effectLst/>
+                        <a:latin typeface="Carlito"/>
+                      </a:endParaRPr>
+                    </a:p>
+                  </a:txBody>
+                  <a:tcPr marL="3537" marR="3537" marT="3537" marB="0" anchor="ctr"/>
+                </a:tc>
+                <a:tc>
+                  <a:txBody>
+                    <a:bodyPr/>
+                    <a:lstStyle/>
+                    <a:p>
+                      <a:pPr algn="ctr" fontAlgn="ctr">
+                        <a:buNone/>
+                      </a:pPr>
+                      <a:r>
+                        <a:rPr lang="en-US" sz="1600" b="1" u="none" strike="noStrike" dirty="0">
+                          <a:effectLst/>
+                        </a:rPr>
+                        <a:t>US</a:t>
+                      </a:r>
+                      <a:endParaRPr lang="en-US" sz="1600" b="1" i="0" u="none" strike="noStrike" dirty="0">
+                        <a:solidFill>
+                          <a:srgbClr val="FFFFFF"/>
+                        </a:solidFill>
+                        <a:effectLst/>
+                        <a:latin typeface="Carlito"/>
+                      </a:endParaRPr>
+                    </a:p>
+                  </a:txBody>
+                  <a:tcPr marL="3537" marR="3537" marT="3537" marB="0" anchor="ctr"/>
+                </a:tc>
+                <a:tc>
+                  <a:txBody>
+                    <a:bodyPr/>
+                    <a:lstStyle/>
+                    <a:p>
+                      <a:pPr algn="ctr" fontAlgn="ctr">
+                        <a:buNone/>
+                      </a:pPr>
+                      <a:r>
+                        <a:rPr lang="en-US" sz="1600" b="1" u="none" strike="noStrike" dirty="0">
+                          <a:effectLst/>
+                        </a:rPr>
+                        <a:t>UK</a:t>
+                      </a:r>
+                      <a:endParaRPr lang="en-US" sz="1600" b="1" i="0" u="none" strike="noStrike" dirty="0">
+                        <a:solidFill>
+                          <a:srgbClr val="FFFFFF"/>
+                        </a:solidFill>
+                        <a:effectLst/>
+                        <a:latin typeface="Carlito"/>
+                      </a:endParaRPr>
+                    </a:p>
+                  </a:txBody>
+                  <a:tcPr marL="3537" marR="3537" marT="3537" marB="0" anchor="ctr"/>
+                </a:tc>
+                <a:tc>
+                  <a:txBody>
+                    <a:bodyPr/>
+                    <a:lstStyle/>
+                    <a:p>
+                      <a:pPr algn="ctr" fontAlgn="ctr">
+                        <a:buNone/>
+                      </a:pPr>
+                      <a:r>
+                        <a:rPr lang="en-US" sz="1600" b="1" u="none" strike="noStrike" dirty="0">
+                          <a:effectLst/>
+                        </a:rPr>
+                        <a:t>Russia</a:t>
+                      </a:r>
+                      <a:endParaRPr lang="en-US" sz="1600" b="1" i="0" u="none" strike="noStrike" dirty="0">
+                        <a:solidFill>
+                          <a:srgbClr val="FFFFFF"/>
+                        </a:solidFill>
+                        <a:effectLst/>
+                        <a:latin typeface="Carlito"/>
+                      </a:endParaRPr>
+                    </a:p>
+                  </a:txBody>
+                  <a:tcPr marL="3537" marR="3537" marT="3537" marB="0" anchor="ctr"/>
+                </a:tc>
+                <a:tc>
+                  <a:txBody>
+                    <a:bodyPr/>
+                    <a:lstStyle/>
+                    <a:p>
+                      <a:pPr algn="ctr" fontAlgn="ctr">
+                        <a:buNone/>
+                      </a:pPr>
+                      <a:r>
+                        <a:rPr lang="en-US" sz="1600" b="1" u="none" strike="noStrike" dirty="0">
+                          <a:effectLst/>
+                        </a:rPr>
+                        <a:t>Brazil</a:t>
+                      </a:r>
+                      <a:endParaRPr lang="en-US" sz="1600" b="1" i="0" u="none" strike="noStrike" dirty="0">
+                        <a:solidFill>
+                          <a:srgbClr val="FFFFFF"/>
+                        </a:solidFill>
+                        <a:effectLst/>
+                        <a:latin typeface="Carlito"/>
+                      </a:endParaRPr>
+                    </a:p>
+                  </a:txBody>
+                  <a:tcPr marL="3537" marR="3537" marT="3537" marB="0" anchor="ctr"/>
+                </a:tc>
+                <a:tc>
+                  <a:txBody>
+                    <a:bodyPr/>
+                    <a:lstStyle/>
+                    <a:p>
+                      <a:pPr algn="ctr" fontAlgn="ctr">
+                        <a:buNone/>
+                      </a:pPr>
+                      <a:r>
+                        <a:rPr lang="en-US" sz="1600" b="1" u="none" strike="noStrike" dirty="0">
+                          <a:effectLst/>
+                        </a:rPr>
+                        <a:t>India</a:t>
+                      </a:r>
+                      <a:endParaRPr lang="en-US" sz="1600" b="1" i="0" u="none" strike="noStrike" dirty="0">
+                        <a:solidFill>
+                          <a:srgbClr val="FFFFFF"/>
+                        </a:solidFill>
+                        <a:effectLst/>
+                        <a:latin typeface="Carlito"/>
+                      </a:endParaRPr>
+                    </a:p>
+                  </a:txBody>
+                  <a:tcPr marL="3537" marR="3537" marT="3537" marB="0" anchor="ctr"/>
+                </a:tc>
+                <a:tc>
+                  <a:txBody>
+                    <a:bodyPr/>
+                    <a:lstStyle/>
+                    <a:p>
+                      <a:pPr algn="ctr" fontAlgn="ctr">
+                        <a:buNone/>
+                      </a:pPr>
+                      <a:r>
+                        <a:rPr lang="en-US" sz="1600" b="1" u="none" strike="noStrike" dirty="0">
+                          <a:effectLst/>
+                        </a:rPr>
+                        <a:t>South Africa</a:t>
+                      </a:r>
+                      <a:endParaRPr lang="en-US" sz="1600" b="1" i="0" u="none" strike="noStrike" dirty="0">
+                        <a:solidFill>
+                          <a:srgbClr val="FFFFFF"/>
+                        </a:solidFill>
+                        <a:effectLst/>
+                        <a:latin typeface="Carlito"/>
+                      </a:endParaRPr>
+                    </a:p>
+                  </a:txBody>
+                  <a:tcPr marL="3537" marR="3537" marT="3537" marB="0" anchor="ctr"/>
+                </a:tc>
+                <a:extLst>
+                  <a:ext uri="{0D108BD9-81ED-4DB2-BD59-A6C34878D82A}">
+                    <a16:rowId xmlns:a16="http://schemas.microsoft.com/office/drawing/2014/main" val="1213599989"/>
+                  </a:ext>
+                </a:extLst>
+              </a:tr>
+              <a:tr h="131462">
+                <a:tc>
+                  <a:txBody>
+                    <a:bodyPr/>
+                    <a:lstStyle/>
+                    <a:p>
+                      <a:pPr algn="l" fontAlgn="ctr">
+                        <a:buNone/>
+                      </a:pPr>
+                      <a:r>
+                        <a:rPr lang="en-US" sz="1600" b="1" u="none" strike="noStrike">
+                          <a:effectLst/>
+                        </a:rPr>
+                        <a:t>Measles</a:t>
+                      </a:r>
+                      <a:endParaRPr lang="en-US" sz="1600" b="1" i="0" u="none" strike="noStrike">
+                        <a:effectLst/>
+                        <a:latin typeface="Carlito"/>
+                      </a:endParaRPr>
+                    </a:p>
+                  </a:txBody>
+                  <a:tcPr marL="3537" marR="3537" marT="3537" marB="0" anchor="ctr"/>
+                </a:tc>
+                <a:tc>
+                  <a:txBody>
+                    <a:bodyPr/>
+                    <a:lstStyle/>
+                    <a:p>
+                      <a:pPr algn="ctr" fontAlgn="ctr">
+                        <a:buNone/>
+                      </a:pPr>
+                      <a:r>
+                        <a:rPr lang="en-US" sz="1600" u="none" strike="noStrike" dirty="0">
+                          <a:effectLst/>
+                        </a:rPr>
+                        <a:t>✓</a:t>
+                      </a:r>
+                      <a:endParaRPr lang="en-US" sz="1600" b="1" i="0" u="none" strike="noStrike" dirty="0">
+                        <a:solidFill>
+                          <a:srgbClr val="1D4D24"/>
+                        </a:solidFill>
+                        <a:effectLst/>
+                        <a:latin typeface="Carlito"/>
+                      </a:endParaRPr>
+                    </a:p>
+                  </a:txBody>
+                  <a:tcPr marL="3537" marR="3537" marT="3537" marB="0" anchor="ctr"/>
+                </a:tc>
+                <a:tc>
+                  <a:txBody>
+                    <a:bodyPr/>
+                    <a:lstStyle/>
+                    <a:p>
+                      <a:pPr algn="ctr" fontAlgn="ctr">
+                        <a:buNone/>
+                      </a:pPr>
+                      <a:r>
+                        <a:rPr lang="en-US" sz="1600" u="none" strike="noStrike">
+                          <a:effectLst/>
+                        </a:rPr>
+                        <a:t>✓</a:t>
+                      </a:r>
+                      <a:endParaRPr lang="en-US" sz="1600" b="1" i="0" u="none" strike="noStrike">
+                        <a:solidFill>
+                          <a:srgbClr val="1D4D24"/>
+                        </a:solidFill>
+                        <a:effectLst/>
+                        <a:latin typeface="Carlito"/>
+                      </a:endParaRPr>
+                    </a:p>
+                  </a:txBody>
+                  <a:tcPr marL="3537" marR="3537" marT="3537" marB="0" anchor="ctr"/>
+                </a:tc>
+                <a:tc>
+                  <a:txBody>
+                    <a:bodyPr/>
+                    <a:lstStyle/>
+                    <a:p>
+                      <a:pPr algn="ctr" fontAlgn="ctr">
+                        <a:buNone/>
+                      </a:pPr>
+                      <a:r>
+                        <a:rPr lang="en-US" sz="1600" u="none" strike="noStrike">
+                          <a:effectLst/>
+                        </a:rPr>
+                        <a:t>✓</a:t>
+                      </a:r>
+                      <a:endParaRPr lang="en-US" sz="1600" b="1" i="0" u="none" strike="noStrike">
+                        <a:solidFill>
+                          <a:srgbClr val="1D4D24"/>
+                        </a:solidFill>
+                        <a:effectLst/>
+                        <a:latin typeface="Carlito"/>
+                      </a:endParaRPr>
+                    </a:p>
+                  </a:txBody>
+                  <a:tcPr marL="3537" marR="3537" marT="3537" marB="0" anchor="ctr"/>
+                </a:tc>
+                <a:tc>
+                  <a:txBody>
+                    <a:bodyPr/>
+                    <a:lstStyle/>
+                    <a:p>
+                      <a:pPr algn="ctr" fontAlgn="ctr">
+                        <a:buNone/>
+                      </a:pPr>
+                      <a:r>
+                        <a:rPr lang="en-US" sz="1600" u="none" strike="noStrike" dirty="0">
+                          <a:effectLst/>
+                        </a:rPr>
+                        <a:t>✓</a:t>
+                      </a:r>
+                      <a:endParaRPr lang="en-US" sz="1600" b="1" i="0" u="none" strike="noStrike" dirty="0">
+                        <a:solidFill>
+                          <a:srgbClr val="1D4D24"/>
+                        </a:solidFill>
+                        <a:effectLst/>
+                        <a:latin typeface="Carlito"/>
+                      </a:endParaRPr>
+                    </a:p>
+                  </a:txBody>
+                  <a:tcPr marL="3537" marR="3537" marT="3537" marB="0" anchor="ctr"/>
+                </a:tc>
+                <a:tc>
+                  <a:txBody>
+                    <a:bodyPr/>
+                    <a:lstStyle/>
+                    <a:p>
+                      <a:pPr algn="ctr" fontAlgn="ctr">
+                        <a:buNone/>
+                      </a:pPr>
+                      <a:r>
+                        <a:rPr lang="en-US" sz="1600" u="none" strike="noStrike">
+                          <a:effectLst/>
+                        </a:rPr>
+                        <a:t>✓</a:t>
+                      </a:r>
+                      <a:endParaRPr lang="en-US" sz="1600" b="1" i="0" u="none" strike="noStrike">
+                        <a:solidFill>
+                          <a:srgbClr val="1D4D24"/>
+                        </a:solidFill>
+                        <a:effectLst/>
+                        <a:latin typeface="Carlito"/>
+                      </a:endParaRPr>
+                    </a:p>
+                  </a:txBody>
+                  <a:tcPr marL="3537" marR="3537" marT="3537" marB="0" anchor="ctr"/>
+                </a:tc>
+                <a:tc>
+                  <a:txBody>
+                    <a:bodyPr/>
+                    <a:lstStyle/>
+                    <a:p>
+                      <a:pPr algn="ctr" fontAlgn="ctr">
+                        <a:buNone/>
+                      </a:pPr>
+                      <a:r>
+                        <a:rPr lang="en-US" sz="1600" u="none" strike="noStrike">
+                          <a:effectLst/>
+                        </a:rPr>
+                        <a:t>✓</a:t>
+                      </a:r>
+                      <a:endParaRPr lang="en-US" sz="1600" b="1" i="0" u="none" strike="noStrike">
+                        <a:solidFill>
+                          <a:srgbClr val="1D4D24"/>
+                        </a:solidFill>
+                        <a:effectLst/>
+                        <a:latin typeface="Carlito"/>
+                      </a:endParaRPr>
+                    </a:p>
+                  </a:txBody>
+                  <a:tcPr marL="3537" marR="3537" marT="3537" marB="0" anchor="ctr"/>
+                </a:tc>
+                <a:tc>
+                  <a:txBody>
+                    <a:bodyPr/>
+                    <a:lstStyle/>
+                    <a:p>
+                      <a:pPr algn="ctr" fontAlgn="ctr">
+                        <a:buNone/>
+                      </a:pPr>
+                      <a:r>
+                        <a:rPr lang="en-US" sz="1600" u="none" strike="noStrike" dirty="0">
+                          <a:effectLst/>
+                        </a:rPr>
+                        <a:t>✓</a:t>
+                      </a:r>
+                      <a:endParaRPr lang="en-US" sz="1600" b="1" i="0" u="none" strike="noStrike" dirty="0">
+                        <a:solidFill>
+                          <a:srgbClr val="1D4D24"/>
+                        </a:solidFill>
+                        <a:effectLst/>
+                        <a:latin typeface="Carlito"/>
+                      </a:endParaRPr>
+                    </a:p>
+                  </a:txBody>
+                  <a:tcPr marL="3537" marR="3537" marT="3537" marB="0" anchor="ctr"/>
+                </a:tc>
+                <a:extLst>
+                  <a:ext uri="{0D108BD9-81ED-4DB2-BD59-A6C34878D82A}">
+                    <a16:rowId xmlns:a16="http://schemas.microsoft.com/office/drawing/2014/main" val="1062925954"/>
+                  </a:ext>
+                </a:extLst>
+              </a:tr>
+              <a:tr h="225200">
+                <a:tc>
+                  <a:txBody>
+                    <a:bodyPr/>
+                    <a:lstStyle/>
+                    <a:p>
+                      <a:pPr algn="l" fontAlgn="ctr">
+                        <a:buNone/>
+                      </a:pPr>
+                      <a:r>
+                        <a:rPr lang="en-US" sz="1600" b="1" u="none" strike="noStrike">
+                          <a:effectLst/>
+                        </a:rPr>
+                        <a:t>Mumps</a:t>
+                      </a:r>
+                      <a:endParaRPr lang="en-US" sz="1600" b="1" i="0" u="none" strike="noStrike">
+                        <a:effectLst/>
+                        <a:latin typeface="Carlito"/>
+                      </a:endParaRPr>
+                    </a:p>
+                  </a:txBody>
+                  <a:tcPr marL="3537" marR="3537" marT="3537" marB="0" anchor="ctr"/>
+                </a:tc>
+                <a:tc>
+                  <a:txBody>
+                    <a:bodyPr/>
+                    <a:lstStyle/>
+                    <a:p>
+                      <a:pPr algn="ctr" fontAlgn="ctr">
+                        <a:buNone/>
+                      </a:pPr>
+                      <a:r>
+                        <a:rPr lang="en-US" sz="1600" u="none" strike="noStrike" dirty="0">
+                          <a:effectLst/>
+                        </a:rPr>
+                        <a:t>✓</a:t>
+                      </a:r>
+                      <a:endParaRPr lang="en-US" sz="1600" b="1" i="0" u="none" strike="noStrike" dirty="0">
+                        <a:solidFill>
+                          <a:srgbClr val="1D4D24"/>
+                        </a:solidFill>
+                        <a:effectLst/>
+                        <a:latin typeface="Carlito"/>
+                      </a:endParaRPr>
+                    </a:p>
+                  </a:txBody>
+                  <a:tcPr marL="3537" marR="3537" marT="3537" marB="0" anchor="ctr"/>
+                </a:tc>
+                <a:tc>
+                  <a:txBody>
+                    <a:bodyPr/>
+                    <a:lstStyle/>
+                    <a:p>
+                      <a:pPr algn="ctr" fontAlgn="ctr">
+                        <a:buNone/>
+                      </a:pPr>
+                      <a:r>
+                        <a:rPr lang="en-US" sz="1600" u="none" strike="noStrike" dirty="0">
+                          <a:effectLst/>
+                        </a:rPr>
+                        <a:t>✓</a:t>
+                      </a:r>
+                      <a:endParaRPr lang="en-US" sz="1600" b="1" i="0" u="none" strike="noStrike" dirty="0">
+                        <a:solidFill>
+                          <a:srgbClr val="1D4D24"/>
+                        </a:solidFill>
+                        <a:effectLst/>
+                        <a:latin typeface="Carlito"/>
+                      </a:endParaRPr>
+                    </a:p>
+                  </a:txBody>
+                  <a:tcPr marL="3537" marR="3537" marT="3537" marB="0" anchor="ctr"/>
+                </a:tc>
+                <a:tc>
+                  <a:txBody>
+                    <a:bodyPr/>
+                    <a:lstStyle/>
+                    <a:p>
+                      <a:pPr algn="ctr" fontAlgn="ctr">
+                        <a:buNone/>
+                      </a:pPr>
+                      <a:r>
+                        <a:rPr lang="en-US" sz="1600" u="none" strike="noStrike">
+                          <a:effectLst/>
+                        </a:rPr>
+                        <a:t>✓</a:t>
+                      </a:r>
+                      <a:endParaRPr lang="en-US" sz="1600" b="1" i="0" u="none" strike="noStrike">
+                        <a:solidFill>
+                          <a:srgbClr val="1D4D24"/>
+                        </a:solidFill>
+                        <a:effectLst/>
+                        <a:latin typeface="Carlito"/>
+                      </a:endParaRPr>
+                    </a:p>
+                  </a:txBody>
+                  <a:tcPr marL="3537" marR="3537" marT="3537" marB="0" anchor="ctr"/>
+                </a:tc>
+                <a:tc>
+                  <a:txBody>
+                    <a:bodyPr/>
+                    <a:lstStyle/>
+                    <a:p>
+                      <a:pPr algn="ctr" fontAlgn="ctr">
+                        <a:buNone/>
+                      </a:pPr>
+                      <a:r>
+                        <a:rPr lang="en-US" sz="1600" u="none" strike="noStrike">
+                          <a:effectLst/>
+                        </a:rPr>
+                        <a:t>✓</a:t>
+                      </a:r>
+                      <a:endParaRPr lang="en-US" sz="1600" b="1" i="0" u="none" strike="noStrike">
+                        <a:solidFill>
+                          <a:srgbClr val="1D4D24"/>
+                        </a:solidFill>
+                        <a:effectLst/>
+                        <a:latin typeface="Carlito"/>
+                      </a:endParaRPr>
+                    </a:p>
+                  </a:txBody>
+                  <a:tcPr marL="3537" marR="3537" marT="3537" marB="0" anchor="ctr"/>
+                </a:tc>
+                <a:tc>
+                  <a:txBody>
+                    <a:bodyPr/>
+                    <a:lstStyle/>
+                    <a:p>
+                      <a:pPr algn="ctr" fontAlgn="ctr">
+                        <a:buNone/>
+                      </a:pPr>
+                      <a:r>
+                        <a:rPr lang="en-US" sz="1600" u="none" strike="noStrike">
+                          <a:effectLst/>
+                        </a:rPr>
+                        <a:t>✓</a:t>
+                      </a:r>
+                      <a:endParaRPr lang="en-US" sz="1600" b="1" i="0" u="none" strike="noStrike">
+                        <a:solidFill>
+                          <a:srgbClr val="1D4D24"/>
+                        </a:solidFill>
+                        <a:effectLst/>
+                        <a:latin typeface="Carlito"/>
+                      </a:endParaRPr>
+                    </a:p>
+                  </a:txBody>
+                  <a:tcPr marL="3537" marR="3537" marT="3537" marB="0" anchor="ctr"/>
+                </a:tc>
+                <a:tc>
+                  <a:txBody>
+                    <a:bodyPr/>
+                    <a:lstStyle/>
+                    <a:p>
+                      <a:pPr algn="ctr" fontAlgn="ctr">
+                        <a:buNone/>
+                      </a:pPr>
+                      <a:r>
+                        <a:rPr lang="en-US" sz="1600" u="none" strike="noStrike" dirty="0">
+                          <a:effectLst/>
+                        </a:rPr>
+                        <a:t>—</a:t>
+                      </a:r>
+                      <a:endParaRPr lang="en-US" sz="1600" b="1" i="0" u="none" strike="noStrike" dirty="0">
+                        <a:solidFill>
+                          <a:srgbClr val="666666"/>
+                        </a:solidFill>
+                        <a:effectLst/>
+                        <a:latin typeface="Carlito"/>
+                      </a:endParaRPr>
+                    </a:p>
+                  </a:txBody>
+                  <a:tcPr marL="3537" marR="3537" marT="3537" marB="0" anchor="ctr"/>
+                </a:tc>
+                <a:tc>
+                  <a:txBody>
+                    <a:bodyPr/>
+                    <a:lstStyle/>
+                    <a:p>
+                      <a:pPr algn="ctr" fontAlgn="ctr">
+                        <a:buNone/>
+                      </a:pPr>
+                      <a:r>
+                        <a:rPr lang="en-US" sz="1600" u="none" strike="noStrike">
+                          <a:effectLst/>
+                        </a:rPr>
+                        <a:t>—</a:t>
+                      </a:r>
+                      <a:endParaRPr lang="en-US" sz="1600" b="1" i="0" u="none" strike="noStrike">
+                        <a:solidFill>
+                          <a:srgbClr val="666666"/>
+                        </a:solidFill>
+                        <a:effectLst/>
+                        <a:latin typeface="Carlito"/>
+                      </a:endParaRPr>
+                    </a:p>
+                  </a:txBody>
+                  <a:tcPr marL="3537" marR="3537" marT="3537" marB="0" anchor="ctr"/>
+                </a:tc>
+                <a:extLst>
+                  <a:ext uri="{0D108BD9-81ED-4DB2-BD59-A6C34878D82A}">
+                    <a16:rowId xmlns:a16="http://schemas.microsoft.com/office/drawing/2014/main" val="888445848"/>
+                  </a:ext>
+                </a:extLst>
+              </a:tr>
+              <a:tr h="262539">
+                <a:tc>
+                  <a:txBody>
+                    <a:bodyPr/>
+                    <a:lstStyle/>
+                    <a:p>
+                      <a:pPr algn="l" fontAlgn="ctr">
+                        <a:buNone/>
+                      </a:pPr>
+                      <a:r>
+                        <a:rPr lang="en-US" sz="1600" b="1" u="none" strike="noStrike">
+                          <a:effectLst/>
+                        </a:rPr>
+                        <a:t>Rubella</a:t>
+                      </a:r>
+                      <a:endParaRPr lang="en-US" sz="1600" b="1" i="0" u="none" strike="noStrike">
+                        <a:effectLst/>
+                        <a:latin typeface="Carlito"/>
+                      </a:endParaRPr>
+                    </a:p>
+                  </a:txBody>
+                  <a:tcPr marL="3537" marR="3537" marT="3537" marB="0" anchor="ctr"/>
+                </a:tc>
+                <a:tc>
+                  <a:txBody>
+                    <a:bodyPr/>
+                    <a:lstStyle/>
+                    <a:p>
+                      <a:pPr algn="ctr" fontAlgn="ctr">
+                        <a:buNone/>
+                      </a:pPr>
+                      <a:r>
+                        <a:rPr lang="en-US" sz="1600" u="none" strike="noStrike">
+                          <a:effectLst/>
+                        </a:rPr>
+                        <a:t>✓</a:t>
+                      </a:r>
+                      <a:endParaRPr lang="en-US" sz="1600" b="1" i="0" u="none" strike="noStrike">
+                        <a:solidFill>
+                          <a:srgbClr val="1D4D24"/>
+                        </a:solidFill>
+                        <a:effectLst/>
+                        <a:latin typeface="Carlito"/>
+                      </a:endParaRPr>
+                    </a:p>
+                  </a:txBody>
+                  <a:tcPr marL="3537" marR="3537" marT="3537" marB="0" anchor="ctr"/>
+                </a:tc>
+                <a:tc>
+                  <a:txBody>
+                    <a:bodyPr/>
+                    <a:lstStyle/>
+                    <a:p>
+                      <a:pPr algn="ctr" fontAlgn="ctr">
+                        <a:buNone/>
+                      </a:pPr>
+                      <a:r>
+                        <a:rPr lang="en-US" sz="1600" u="none" strike="noStrike">
+                          <a:effectLst/>
+                        </a:rPr>
+                        <a:t>✓</a:t>
+                      </a:r>
+                      <a:endParaRPr lang="en-US" sz="1600" b="1" i="0" u="none" strike="noStrike">
+                        <a:solidFill>
+                          <a:srgbClr val="1D4D24"/>
+                        </a:solidFill>
+                        <a:effectLst/>
+                        <a:latin typeface="Carlito"/>
+                      </a:endParaRPr>
+                    </a:p>
+                  </a:txBody>
+                  <a:tcPr marL="3537" marR="3537" marT="3537" marB="0" anchor="ctr"/>
+                </a:tc>
+                <a:tc>
+                  <a:txBody>
+                    <a:bodyPr/>
+                    <a:lstStyle/>
+                    <a:p>
+                      <a:pPr algn="ctr" fontAlgn="ctr">
+                        <a:buNone/>
+                      </a:pPr>
+                      <a:r>
+                        <a:rPr lang="en-US" sz="1600" u="none" strike="noStrike" dirty="0">
+                          <a:effectLst/>
+                        </a:rPr>
+                        <a:t>✓</a:t>
+                      </a:r>
+                      <a:endParaRPr lang="en-US" sz="1600" b="1" i="0" u="none" strike="noStrike" dirty="0">
+                        <a:solidFill>
+                          <a:srgbClr val="1D4D24"/>
+                        </a:solidFill>
+                        <a:effectLst/>
+                        <a:latin typeface="Carlito"/>
+                      </a:endParaRPr>
+                    </a:p>
+                  </a:txBody>
+                  <a:tcPr marL="3537" marR="3537" marT="3537" marB="0" anchor="ctr"/>
+                </a:tc>
+                <a:tc>
+                  <a:txBody>
+                    <a:bodyPr/>
+                    <a:lstStyle/>
+                    <a:p>
+                      <a:pPr algn="ctr" fontAlgn="ctr">
+                        <a:buNone/>
+                      </a:pPr>
+                      <a:r>
+                        <a:rPr lang="en-US" sz="1600" u="none" strike="noStrike">
+                          <a:effectLst/>
+                        </a:rPr>
+                        <a:t>✓</a:t>
+                      </a:r>
+                      <a:endParaRPr lang="en-US" sz="1600" b="1" i="0" u="none" strike="noStrike">
+                        <a:solidFill>
+                          <a:srgbClr val="1D4D24"/>
+                        </a:solidFill>
+                        <a:effectLst/>
+                        <a:latin typeface="Carlito"/>
+                      </a:endParaRPr>
+                    </a:p>
+                  </a:txBody>
+                  <a:tcPr marL="3537" marR="3537" marT="3537" marB="0" anchor="ctr"/>
+                </a:tc>
+                <a:tc>
+                  <a:txBody>
+                    <a:bodyPr/>
+                    <a:lstStyle/>
+                    <a:p>
+                      <a:pPr algn="ctr" fontAlgn="ctr">
+                        <a:buNone/>
+                      </a:pPr>
+                      <a:r>
+                        <a:rPr lang="en-US" sz="1600" u="none" strike="noStrike">
+                          <a:effectLst/>
+                        </a:rPr>
+                        <a:t>✓</a:t>
+                      </a:r>
+                      <a:endParaRPr lang="en-US" sz="1600" b="1" i="0" u="none" strike="noStrike">
+                        <a:solidFill>
+                          <a:srgbClr val="1D4D24"/>
+                        </a:solidFill>
+                        <a:effectLst/>
+                        <a:latin typeface="Carlito"/>
+                      </a:endParaRPr>
+                    </a:p>
+                  </a:txBody>
+                  <a:tcPr marL="3537" marR="3537" marT="3537" marB="0" anchor="ctr"/>
+                </a:tc>
+                <a:tc>
+                  <a:txBody>
+                    <a:bodyPr/>
+                    <a:lstStyle/>
+                    <a:p>
+                      <a:pPr algn="ctr" fontAlgn="ctr">
+                        <a:buNone/>
+                      </a:pPr>
+                      <a:r>
+                        <a:rPr lang="en-US" sz="1600" u="none" strike="noStrike" dirty="0">
+                          <a:effectLst/>
+                        </a:rPr>
+                        <a:t>✓</a:t>
+                      </a:r>
+                      <a:endParaRPr lang="en-US" sz="1600" b="1" i="0" u="none" strike="noStrike" dirty="0">
+                        <a:solidFill>
+                          <a:srgbClr val="1D4D24"/>
+                        </a:solidFill>
+                        <a:effectLst/>
+                        <a:latin typeface="Carlito"/>
+                      </a:endParaRPr>
+                    </a:p>
+                  </a:txBody>
+                  <a:tcPr marL="3537" marR="3537" marT="3537" marB="0" anchor="ctr"/>
+                </a:tc>
+                <a:tc>
+                  <a:txBody>
+                    <a:bodyPr/>
+                    <a:lstStyle/>
+                    <a:p>
+                      <a:pPr algn="ctr" fontAlgn="ctr">
+                        <a:buNone/>
+                      </a:pPr>
+                      <a:r>
+                        <a:rPr lang="en-US" sz="1600" u="none" strike="noStrike">
+                          <a:effectLst/>
+                        </a:rPr>
+                        <a:t>✓</a:t>
+                      </a:r>
+                      <a:endParaRPr lang="en-US" sz="1600" b="1" i="0" u="none" strike="noStrike">
+                        <a:solidFill>
+                          <a:srgbClr val="1D4D24"/>
+                        </a:solidFill>
+                        <a:effectLst/>
+                        <a:latin typeface="Carlito"/>
+                      </a:endParaRPr>
+                    </a:p>
+                  </a:txBody>
+                  <a:tcPr marL="3537" marR="3537" marT="3537" marB="0" anchor="ctr"/>
+                </a:tc>
+                <a:extLst>
+                  <a:ext uri="{0D108BD9-81ED-4DB2-BD59-A6C34878D82A}">
+                    <a16:rowId xmlns:a16="http://schemas.microsoft.com/office/drawing/2014/main" val="1901008945"/>
+                  </a:ext>
+                </a:extLst>
+              </a:tr>
+              <a:tr h="225200">
+                <a:tc>
+                  <a:txBody>
+                    <a:bodyPr/>
+                    <a:lstStyle/>
+                    <a:p>
+                      <a:pPr algn="l" fontAlgn="ctr">
+                        <a:buNone/>
+                      </a:pPr>
+                      <a:r>
+                        <a:rPr lang="en-US" sz="1600" b="1" u="none" strike="noStrike" dirty="0">
+                          <a:effectLst/>
+                          <a:highlight>
+                            <a:srgbClr val="FFFF00"/>
+                          </a:highlight>
+                        </a:rPr>
+                        <a:t>Seasonal influenza</a:t>
+                      </a:r>
+                      <a:endParaRPr lang="en-US" sz="1600" b="1" i="0" u="none" strike="noStrike" dirty="0">
+                        <a:effectLst/>
+                        <a:highlight>
+                          <a:srgbClr val="FFFF00"/>
+                        </a:highlight>
+                        <a:latin typeface="Carlito"/>
+                      </a:endParaRPr>
+                    </a:p>
+                  </a:txBody>
+                  <a:tcPr marL="3537" marR="3537" marT="3537" marB="0" anchor="ctr"/>
+                </a:tc>
+                <a:tc>
+                  <a:txBody>
+                    <a:bodyPr/>
+                    <a:lstStyle/>
+                    <a:p>
+                      <a:pPr algn="ctr" fontAlgn="ctr">
+                        <a:buNone/>
+                      </a:pPr>
+                      <a:r>
+                        <a:rPr lang="en-US" sz="1600" u="none" strike="noStrike" dirty="0">
+                          <a:effectLst/>
+                          <a:highlight>
+                            <a:srgbClr val="FFFF00"/>
+                          </a:highlight>
+                        </a:rPr>
+                        <a:t>—</a:t>
+                      </a:r>
+                      <a:endParaRPr lang="en-US" sz="1600" b="1" i="0" u="none" strike="noStrike" dirty="0">
+                        <a:solidFill>
+                          <a:srgbClr val="666666"/>
+                        </a:solidFill>
+                        <a:effectLst/>
+                        <a:highlight>
+                          <a:srgbClr val="FFFF00"/>
+                        </a:highlight>
+                        <a:latin typeface="Carlito"/>
+                      </a:endParaRPr>
+                    </a:p>
+                  </a:txBody>
+                  <a:tcPr marL="3537" marR="3537" marT="3537" marB="0" anchor="ctr"/>
+                </a:tc>
+                <a:tc>
+                  <a:txBody>
+                    <a:bodyPr/>
+                    <a:lstStyle/>
+                    <a:p>
+                      <a:pPr algn="ctr" fontAlgn="ctr">
+                        <a:buNone/>
+                      </a:pPr>
+                      <a:r>
+                        <a:rPr lang="en-US" sz="1600" u="none" strike="noStrike" dirty="0">
+                          <a:effectLst/>
+                          <a:highlight>
+                            <a:srgbClr val="FFFF00"/>
+                          </a:highlight>
+                        </a:rPr>
+                        <a:t>✓</a:t>
+                      </a:r>
+                      <a:endParaRPr lang="en-US" sz="1600" b="1" i="0" u="none" strike="noStrike" dirty="0">
+                        <a:solidFill>
+                          <a:srgbClr val="1D4D24"/>
+                        </a:solidFill>
+                        <a:effectLst/>
+                        <a:highlight>
+                          <a:srgbClr val="FFFF00"/>
+                        </a:highlight>
+                        <a:latin typeface="Carlito"/>
+                      </a:endParaRPr>
+                    </a:p>
+                  </a:txBody>
+                  <a:tcPr marL="3537" marR="3537" marT="3537" marB="0" anchor="ctr"/>
+                </a:tc>
+                <a:tc>
+                  <a:txBody>
+                    <a:bodyPr/>
+                    <a:lstStyle/>
+                    <a:p>
+                      <a:pPr algn="ctr" fontAlgn="ctr">
+                        <a:buNone/>
+                      </a:pPr>
+                      <a:r>
+                        <a:rPr lang="en-US" sz="1600" u="none" strike="noStrike" dirty="0">
+                          <a:effectLst/>
+                          <a:highlight>
+                            <a:srgbClr val="FFFF00"/>
+                          </a:highlight>
+                        </a:rPr>
+                        <a:t>✓</a:t>
+                      </a:r>
+                      <a:endParaRPr lang="en-US" sz="1600" b="1" i="0" u="none" strike="noStrike" dirty="0">
+                        <a:solidFill>
+                          <a:srgbClr val="1D4D24"/>
+                        </a:solidFill>
+                        <a:effectLst/>
+                        <a:highlight>
+                          <a:srgbClr val="FFFF00"/>
+                        </a:highlight>
+                        <a:latin typeface="Carlito"/>
+                      </a:endParaRPr>
+                    </a:p>
+                  </a:txBody>
+                  <a:tcPr marL="3537" marR="3537" marT="3537" marB="0" anchor="ctr"/>
+                </a:tc>
+                <a:tc>
+                  <a:txBody>
+                    <a:bodyPr/>
+                    <a:lstStyle/>
+                    <a:p>
+                      <a:pPr algn="ctr" fontAlgn="ctr">
+                        <a:buNone/>
+                      </a:pPr>
+                      <a:r>
+                        <a:rPr lang="en-US" sz="1600" u="none" strike="noStrike" dirty="0">
+                          <a:effectLst/>
+                          <a:highlight>
+                            <a:srgbClr val="FFFF00"/>
+                          </a:highlight>
+                        </a:rPr>
+                        <a:t>✓</a:t>
+                      </a:r>
+                      <a:endParaRPr lang="en-US" sz="1600" b="1" i="0" u="none" strike="noStrike" dirty="0">
+                        <a:solidFill>
+                          <a:srgbClr val="1D4D24"/>
+                        </a:solidFill>
+                        <a:effectLst/>
+                        <a:highlight>
+                          <a:srgbClr val="FFFF00"/>
+                        </a:highlight>
+                        <a:latin typeface="Carlito"/>
+                      </a:endParaRPr>
+                    </a:p>
+                  </a:txBody>
+                  <a:tcPr marL="3537" marR="3537" marT="3537" marB="0" anchor="ctr"/>
+                </a:tc>
+                <a:tc>
+                  <a:txBody>
+                    <a:bodyPr/>
+                    <a:lstStyle/>
+                    <a:p>
+                      <a:pPr algn="ctr" fontAlgn="ctr">
+                        <a:buNone/>
+                      </a:pPr>
+                      <a:r>
+                        <a:rPr lang="en-US" sz="1600" u="none" strike="noStrike" dirty="0">
+                          <a:effectLst/>
+                          <a:highlight>
+                            <a:srgbClr val="FFFF00"/>
+                          </a:highlight>
+                        </a:rPr>
+                        <a:t>✓</a:t>
+                      </a:r>
+                      <a:endParaRPr lang="en-US" sz="1600" b="1" i="0" u="none" strike="noStrike" dirty="0">
+                        <a:solidFill>
+                          <a:srgbClr val="1D4D24"/>
+                        </a:solidFill>
+                        <a:effectLst/>
+                        <a:highlight>
+                          <a:srgbClr val="FFFF00"/>
+                        </a:highlight>
+                        <a:latin typeface="Carlito"/>
+                      </a:endParaRPr>
+                    </a:p>
+                  </a:txBody>
+                  <a:tcPr marL="3537" marR="3537" marT="3537" marB="0" anchor="ctr"/>
+                </a:tc>
+                <a:tc>
+                  <a:txBody>
+                    <a:bodyPr/>
+                    <a:lstStyle/>
+                    <a:p>
+                      <a:pPr algn="ctr" fontAlgn="ctr">
+                        <a:buNone/>
+                      </a:pPr>
+                      <a:r>
+                        <a:rPr lang="en-US" sz="1600" u="none" strike="noStrike" dirty="0">
+                          <a:effectLst/>
+                          <a:highlight>
+                            <a:srgbClr val="FFFF00"/>
+                          </a:highlight>
+                        </a:rPr>
+                        <a:t>—</a:t>
+                      </a:r>
+                      <a:endParaRPr lang="en-US" sz="1600" b="1" i="0" u="none" strike="noStrike" dirty="0">
+                        <a:solidFill>
+                          <a:srgbClr val="666666"/>
+                        </a:solidFill>
+                        <a:effectLst/>
+                        <a:highlight>
+                          <a:srgbClr val="FFFF00"/>
+                        </a:highlight>
+                        <a:latin typeface="Carlito"/>
+                      </a:endParaRPr>
+                    </a:p>
+                  </a:txBody>
+                  <a:tcPr marL="3537" marR="3537" marT="3537" marB="0" anchor="ctr"/>
+                </a:tc>
+                <a:tc>
+                  <a:txBody>
+                    <a:bodyPr/>
+                    <a:lstStyle/>
+                    <a:p>
+                      <a:pPr algn="ctr" fontAlgn="ctr">
+                        <a:buNone/>
+                      </a:pPr>
+                      <a:r>
+                        <a:rPr lang="en-US" sz="1600" u="none" strike="noStrike" dirty="0">
+                          <a:effectLst/>
+                          <a:highlight>
+                            <a:srgbClr val="FFFF00"/>
+                          </a:highlight>
+                        </a:rPr>
+                        <a:t>◐</a:t>
+                      </a:r>
+                      <a:endParaRPr lang="en-US" sz="1600" b="1" i="0" u="none" strike="noStrike" dirty="0">
+                        <a:solidFill>
+                          <a:srgbClr val="6A4C00"/>
+                        </a:solidFill>
+                        <a:effectLst/>
+                        <a:highlight>
+                          <a:srgbClr val="FFFF00"/>
+                        </a:highlight>
+                        <a:latin typeface="Carlito"/>
+                      </a:endParaRPr>
+                    </a:p>
+                  </a:txBody>
+                  <a:tcPr marL="3537" marR="3537" marT="3537" marB="0" anchor="ctr"/>
+                </a:tc>
+                <a:extLst>
+                  <a:ext uri="{0D108BD9-81ED-4DB2-BD59-A6C34878D82A}">
+                    <a16:rowId xmlns:a16="http://schemas.microsoft.com/office/drawing/2014/main" val="2141937294"/>
+                  </a:ext>
+                </a:extLst>
+              </a:tr>
+              <a:tr h="337800">
+                <a:tc>
+                  <a:txBody>
+                    <a:bodyPr/>
+                    <a:lstStyle/>
+                    <a:p>
+                      <a:pPr algn="l" fontAlgn="ctr">
+                        <a:buNone/>
+                      </a:pPr>
+                      <a:r>
+                        <a:rPr lang="en-US" sz="1600" b="1" i="0" u="none" strike="noStrike" dirty="0">
+                          <a:effectLst/>
+                          <a:latin typeface="Carlito"/>
+                        </a:rPr>
+                        <a:t>HPV</a:t>
+                      </a:r>
+                    </a:p>
+                  </a:txBody>
+                  <a:tcPr marL="3537" marR="3537" marT="3537" marB="0" anchor="ctr"/>
+                </a:tc>
+                <a:tc>
+                  <a:txBody>
+                    <a:bodyPr/>
+                    <a:lstStyle/>
+                    <a:p>
+                      <a:pPr algn="ctr" fontAlgn="ctr">
+                        <a:buNone/>
+                      </a:pPr>
+                      <a:r>
+                        <a:rPr lang="en-US" sz="1600" u="none" strike="noStrike">
+                          <a:effectLst/>
+                        </a:rPr>
+                        <a:t>✓</a:t>
+                      </a:r>
+                      <a:endParaRPr lang="en-US" sz="1600" b="1" i="0" u="none" strike="noStrike">
+                        <a:solidFill>
+                          <a:srgbClr val="1D4D24"/>
+                        </a:solidFill>
+                        <a:effectLst/>
+                        <a:latin typeface="Carlito"/>
+                      </a:endParaRPr>
+                    </a:p>
+                  </a:txBody>
+                  <a:tcPr marL="3537" marR="3537" marT="3537" marB="0" anchor="ctr"/>
+                </a:tc>
+                <a:tc>
+                  <a:txBody>
+                    <a:bodyPr/>
+                    <a:lstStyle/>
+                    <a:p>
+                      <a:pPr algn="ctr" fontAlgn="ctr">
+                        <a:buNone/>
+                      </a:pPr>
+                      <a:r>
+                        <a:rPr lang="en-US" sz="1600" u="none" strike="noStrike">
+                          <a:effectLst/>
+                        </a:rPr>
+                        <a:t>✓</a:t>
+                      </a:r>
+                      <a:endParaRPr lang="en-US" sz="1600" b="1" i="0" u="none" strike="noStrike">
+                        <a:solidFill>
+                          <a:srgbClr val="1D4D24"/>
+                        </a:solidFill>
+                        <a:effectLst/>
+                        <a:latin typeface="Carlito"/>
+                      </a:endParaRPr>
+                    </a:p>
+                  </a:txBody>
+                  <a:tcPr marL="3537" marR="3537" marT="3537" marB="0" anchor="ctr"/>
+                </a:tc>
+                <a:tc>
+                  <a:txBody>
+                    <a:bodyPr/>
+                    <a:lstStyle/>
+                    <a:p>
+                      <a:pPr algn="ctr" fontAlgn="ctr">
+                        <a:buNone/>
+                      </a:pPr>
+                      <a:r>
+                        <a:rPr lang="en-US" sz="1600" u="none" strike="noStrike">
+                          <a:effectLst/>
+                        </a:rPr>
+                        <a:t>✓</a:t>
+                      </a:r>
+                      <a:endParaRPr lang="en-US" sz="1600" b="1" i="0" u="none" strike="noStrike">
+                        <a:solidFill>
+                          <a:srgbClr val="1D4D24"/>
+                        </a:solidFill>
+                        <a:effectLst/>
+                        <a:latin typeface="Carlito"/>
+                      </a:endParaRPr>
+                    </a:p>
+                  </a:txBody>
+                  <a:tcPr marL="3537" marR="3537" marT="3537" marB="0" anchor="ctr"/>
+                </a:tc>
+                <a:tc>
+                  <a:txBody>
+                    <a:bodyPr/>
+                    <a:lstStyle/>
+                    <a:p>
+                      <a:pPr algn="ctr" fontAlgn="ctr">
+                        <a:buNone/>
+                      </a:pPr>
+                      <a:r>
+                        <a:rPr lang="en-US" sz="1600" u="none" strike="noStrike" dirty="0">
+                          <a:effectLst/>
+                        </a:rPr>
+                        <a:t>—</a:t>
+                      </a:r>
+                      <a:endParaRPr lang="en-US" sz="1600" b="1" i="0" u="none" strike="noStrike" dirty="0">
+                        <a:solidFill>
+                          <a:srgbClr val="666666"/>
+                        </a:solidFill>
+                        <a:effectLst/>
+                        <a:latin typeface="Carlito"/>
+                      </a:endParaRPr>
+                    </a:p>
+                  </a:txBody>
+                  <a:tcPr marL="3537" marR="3537" marT="3537" marB="0" anchor="ctr"/>
+                </a:tc>
+                <a:tc>
+                  <a:txBody>
+                    <a:bodyPr/>
+                    <a:lstStyle/>
+                    <a:p>
+                      <a:pPr algn="ctr" fontAlgn="ctr">
+                        <a:buNone/>
+                      </a:pPr>
+                      <a:r>
+                        <a:rPr lang="en-US" sz="1600" u="none" strike="noStrike">
+                          <a:effectLst/>
+                        </a:rPr>
+                        <a:t>✓</a:t>
+                      </a:r>
+                      <a:endParaRPr lang="en-US" sz="1600" b="1" i="0" u="none" strike="noStrike">
+                        <a:solidFill>
+                          <a:srgbClr val="1D4D24"/>
+                        </a:solidFill>
+                        <a:effectLst/>
+                        <a:latin typeface="Carlito"/>
+                      </a:endParaRPr>
+                    </a:p>
+                  </a:txBody>
+                  <a:tcPr marL="3537" marR="3537" marT="3537" marB="0" anchor="ctr"/>
+                </a:tc>
+                <a:tc>
+                  <a:txBody>
+                    <a:bodyPr/>
+                    <a:lstStyle/>
+                    <a:p>
+                      <a:pPr algn="ctr" fontAlgn="ctr">
+                        <a:buNone/>
+                      </a:pPr>
+                      <a:r>
+                        <a:rPr lang="en-US" sz="1600" u="none" strike="noStrike">
+                          <a:effectLst/>
+                        </a:rPr>
+                        <a:t>✓</a:t>
+                      </a:r>
+                      <a:endParaRPr lang="en-US" sz="1600" b="1" i="0" u="none" strike="noStrike">
+                        <a:solidFill>
+                          <a:srgbClr val="1D4D24"/>
+                        </a:solidFill>
+                        <a:effectLst/>
+                        <a:latin typeface="Carlito"/>
+                      </a:endParaRPr>
+                    </a:p>
+                  </a:txBody>
+                  <a:tcPr marL="3537" marR="3537" marT="3537" marB="0" anchor="ctr"/>
+                </a:tc>
+                <a:tc>
+                  <a:txBody>
+                    <a:bodyPr/>
+                    <a:lstStyle/>
+                    <a:p>
+                      <a:pPr algn="ctr" fontAlgn="ctr">
+                        <a:buNone/>
+                      </a:pPr>
+                      <a:r>
+                        <a:rPr lang="en-US" sz="1600" u="none" strike="noStrike" dirty="0">
+                          <a:effectLst/>
+                        </a:rPr>
+                        <a:t>✓</a:t>
+                      </a:r>
+                      <a:endParaRPr lang="en-US" sz="1600" b="1" i="0" u="none" strike="noStrike" dirty="0">
+                        <a:solidFill>
+                          <a:srgbClr val="1D4D24"/>
+                        </a:solidFill>
+                        <a:effectLst/>
+                        <a:latin typeface="Carlito"/>
+                      </a:endParaRPr>
+                    </a:p>
+                  </a:txBody>
+                  <a:tcPr marL="3537" marR="3537" marT="3537" marB="0" anchor="ctr"/>
+                </a:tc>
+                <a:extLst>
+                  <a:ext uri="{0D108BD9-81ED-4DB2-BD59-A6C34878D82A}">
+                    <a16:rowId xmlns:a16="http://schemas.microsoft.com/office/drawing/2014/main" val="3621958238"/>
+                  </a:ext>
+                </a:extLst>
+              </a:tr>
+              <a:tr h="342696">
+                <a:tc>
+                  <a:txBody>
+                    <a:bodyPr/>
+                    <a:lstStyle/>
+                    <a:p>
+                      <a:pPr algn="l" fontAlgn="b">
+                        <a:buNone/>
+                      </a:pPr>
+                      <a:r>
+                        <a:rPr lang="en-US" sz="1600" b="1" u="none" strike="noStrike" dirty="0">
+                          <a:effectLst/>
+                        </a:rPr>
+                        <a:t>Respiratory syncytial virus (RSV)</a:t>
+                      </a:r>
+                      <a:endParaRPr lang="en-US" sz="1600" b="1" i="0" u="none" strike="noStrike" dirty="0">
+                        <a:effectLst/>
+                        <a:latin typeface="Carlito"/>
+                      </a:endParaRPr>
+                    </a:p>
+                  </a:txBody>
+                  <a:tcPr marL="3537" marR="3537" marT="3537" marB="0" anchor="b"/>
+                </a:tc>
+                <a:tc>
+                  <a:txBody>
+                    <a:bodyPr/>
+                    <a:lstStyle/>
+                    <a:p>
+                      <a:pPr algn="ctr" fontAlgn="b">
+                        <a:buNone/>
+                      </a:pPr>
+                      <a:r>
+                        <a:rPr lang="en-US" sz="1600" u="none" strike="noStrike">
+                          <a:effectLst/>
+                        </a:rPr>
+                        <a:t>—</a:t>
+                      </a:r>
+                      <a:endParaRPr lang="en-US" sz="1600" b="1" i="0" u="none" strike="noStrike">
+                        <a:solidFill>
+                          <a:srgbClr val="666666"/>
+                        </a:solidFill>
+                        <a:effectLst/>
+                        <a:latin typeface="Carlito"/>
+                      </a:endParaRPr>
+                    </a:p>
+                  </a:txBody>
+                  <a:tcPr marL="3537" marR="3537" marT="3537" marB="0" anchor="b"/>
+                </a:tc>
+                <a:tc>
+                  <a:txBody>
+                    <a:bodyPr/>
+                    <a:lstStyle/>
+                    <a:p>
+                      <a:pPr algn="ctr" fontAlgn="b">
+                        <a:buNone/>
+                      </a:pPr>
+                      <a:r>
+                        <a:rPr lang="en-US" sz="1600" u="none" strike="noStrike">
+                          <a:effectLst/>
+                        </a:rPr>
+                        <a:t>◐</a:t>
+                      </a:r>
+                      <a:endParaRPr lang="en-US" sz="1600" b="1" i="0" u="none" strike="noStrike">
+                        <a:solidFill>
+                          <a:srgbClr val="6A4C00"/>
+                        </a:solidFill>
+                        <a:effectLst/>
+                        <a:latin typeface="Carlito"/>
+                      </a:endParaRPr>
+                    </a:p>
+                  </a:txBody>
+                  <a:tcPr marL="3537" marR="3537" marT="3537" marB="0" anchor="b"/>
+                </a:tc>
+                <a:tc>
+                  <a:txBody>
+                    <a:bodyPr/>
+                    <a:lstStyle/>
+                    <a:p>
+                      <a:pPr algn="ctr" fontAlgn="b">
+                        <a:buNone/>
+                      </a:pPr>
+                      <a:r>
+                        <a:rPr lang="en-US" sz="1600" u="none" strike="noStrike" dirty="0">
+                          <a:effectLst/>
+                        </a:rPr>
+                        <a:t>✓</a:t>
+                      </a:r>
+                      <a:endParaRPr lang="en-US" sz="1600" b="1" i="0" u="none" strike="noStrike" dirty="0">
+                        <a:solidFill>
+                          <a:srgbClr val="1D4D24"/>
+                        </a:solidFill>
+                        <a:effectLst/>
+                        <a:latin typeface="Carlito"/>
+                      </a:endParaRPr>
+                    </a:p>
+                  </a:txBody>
+                  <a:tcPr marL="3537" marR="3537" marT="3537" marB="0" anchor="b"/>
+                </a:tc>
+                <a:tc>
+                  <a:txBody>
+                    <a:bodyPr/>
+                    <a:lstStyle/>
+                    <a:p>
+                      <a:pPr algn="ctr" fontAlgn="b">
+                        <a:buNone/>
+                      </a:pPr>
+                      <a:r>
+                        <a:rPr lang="en-US" sz="1600" u="none" strike="noStrike" dirty="0">
+                          <a:effectLst/>
+                        </a:rPr>
+                        <a:t>—</a:t>
+                      </a:r>
+                      <a:endParaRPr lang="en-US" sz="1600" b="1" i="0" u="none" strike="noStrike" dirty="0">
+                        <a:solidFill>
+                          <a:srgbClr val="666666"/>
+                        </a:solidFill>
+                        <a:effectLst/>
+                        <a:latin typeface="Carlito"/>
+                      </a:endParaRPr>
+                    </a:p>
+                  </a:txBody>
+                  <a:tcPr marL="3537" marR="3537" marT="3537" marB="0" anchor="b"/>
+                </a:tc>
+                <a:tc>
+                  <a:txBody>
+                    <a:bodyPr/>
+                    <a:lstStyle/>
+                    <a:p>
+                      <a:pPr algn="ctr" fontAlgn="b">
+                        <a:buNone/>
+                      </a:pPr>
+                      <a:r>
+                        <a:rPr lang="en-US" sz="1600" u="none" strike="noStrike" dirty="0">
+                          <a:effectLst/>
+                        </a:rPr>
+                        <a:t>✓</a:t>
+                      </a:r>
+                      <a:endParaRPr lang="en-US" sz="1600" b="1" i="0" u="none" strike="noStrike" dirty="0">
+                        <a:solidFill>
+                          <a:srgbClr val="1D4D24"/>
+                        </a:solidFill>
+                        <a:effectLst/>
+                        <a:latin typeface="Carlito"/>
+                      </a:endParaRPr>
+                    </a:p>
+                  </a:txBody>
+                  <a:tcPr marL="3537" marR="3537" marT="3537" marB="0" anchor="b"/>
+                </a:tc>
+                <a:tc>
+                  <a:txBody>
+                    <a:bodyPr/>
+                    <a:lstStyle/>
+                    <a:p>
+                      <a:pPr algn="ctr" fontAlgn="b">
+                        <a:buNone/>
+                      </a:pPr>
+                      <a:r>
+                        <a:rPr lang="en-US" sz="1600" u="none" strike="noStrike" dirty="0">
+                          <a:effectLst/>
+                        </a:rPr>
+                        <a:t>—</a:t>
+                      </a:r>
+                      <a:endParaRPr lang="en-US" sz="1600" b="1" i="0" u="none" strike="noStrike" dirty="0">
+                        <a:solidFill>
+                          <a:srgbClr val="666666"/>
+                        </a:solidFill>
+                        <a:effectLst/>
+                        <a:latin typeface="Carlito"/>
+                      </a:endParaRPr>
+                    </a:p>
+                  </a:txBody>
+                  <a:tcPr marL="3537" marR="3537" marT="3537" marB="0" anchor="b"/>
+                </a:tc>
+                <a:tc>
+                  <a:txBody>
+                    <a:bodyPr/>
+                    <a:lstStyle/>
+                    <a:p>
+                      <a:pPr algn="ctr" fontAlgn="b">
+                        <a:buNone/>
+                      </a:pPr>
+                      <a:r>
+                        <a:rPr lang="en-US" sz="1600" u="none" strike="noStrike" dirty="0">
+                          <a:effectLst/>
+                        </a:rPr>
+                        <a:t>—</a:t>
+                      </a:r>
+                      <a:endParaRPr lang="en-US" sz="1600" b="1" i="0" u="none" strike="noStrike" dirty="0">
+                        <a:solidFill>
+                          <a:srgbClr val="666666"/>
+                        </a:solidFill>
+                        <a:effectLst/>
+                        <a:latin typeface="Carlito"/>
+                      </a:endParaRPr>
+                    </a:p>
+                  </a:txBody>
+                  <a:tcPr marL="3537" marR="3537" marT="3537" marB="0" anchor="b"/>
+                </a:tc>
+                <a:extLst>
+                  <a:ext uri="{0D108BD9-81ED-4DB2-BD59-A6C34878D82A}">
+                    <a16:rowId xmlns:a16="http://schemas.microsoft.com/office/drawing/2014/main" val="2330737685"/>
+                  </a:ext>
+                </a:extLst>
+              </a:tr>
+            </a:tbl>
+          </a:graphicData>
+        </a:graphic>
+      </p:graphicFrame>
+      <p:graphicFrame>
+        <p:nvGraphicFramePr>
+          <p:cNvPr id="8" name="Table 7">
+            <a:extLst>
+              <a:ext uri="{FF2B5EF4-FFF2-40B4-BE49-F238E27FC236}">
+                <a16:creationId xmlns:a16="http://schemas.microsoft.com/office/drawing/2014/main" id="{156675D0-2A25-A3BE-A7D2-CE0614262BFE}"/>
+              </a:ext>
+            </a:extLst>
+          </p:cNvPr>
+          <p:cNvGraphicFramePr>
+            <a:graphicFrameLocks noGrp="1"/>
+          </p:cNvGraphicFramePr>
+          <p:nvPr>
+            <p:extLst>
+              <p:ext uri="{D42A27DB-BD31-4B8C-83A1-F6EECF244321}">
+                <p14:modId xmlns:p14="http://schemas.microsoft.com/office/powerpoint/2010/main" val="1429438039"/>
+              </p:ext>
+            </p:extLst>
+          </p:nvPr>
+        </p:nvGraphicFramePr>
+        <p:xfrm>
+          <a:off x="5479646" y="5219865"/>
+          <a:ext cx="6366871" cy="981044"/>
+        </p:xfrm>
+        <a:graphic>
+          <a:graphicData uri="http://schemas.openxmlformats.org/drawingml/2006/table">
+            <a:tbl>
+              <a:tblPr>
+                <a:tableStyleId>{5C22544A-7EE6-4342-B048-85BDC9FD1C3A}</a:tableStyleId>
+              </a:tblPr>
+              <a:tblGrid>
+                <a:gridCol w="6366871">
+                  <a:extLst>
+                    <a:ext uri="{9D8B030D-6E8A-4147-A177-3AD203B41FA5}">
+                      <a16:colId xmlns:a16="http://schemas.microsoft.com/office/drawing/2014/main" val="2241031708"/>
+                    </a:ext>
+                  </a:extLst>
+                </a:gridCol>
+              </a:tblGrid>
+              <a:tr h="981044">
+                <a:tc>
+                  <a:txBody>
+                    <a:bodyPr/>
+                    <a:lstStyle/>
+                    <a:p>
+                      <a:pPr algn="l" fontAlgn="ctr">
+                        <a:buNone/>
+                      </a:pPr>
+                      <a:r>
+                        <a:rPr lang="en-US" sz="1600" u="none" strike="noStrike" dirty="0">
+                          <a:effectLst/>
+                        </a:rPr>
+                        <a:t>Legend:  ✓ routine national </a:t>
+                      </a:r>
+                      <a:r>
+                        <a:rPr lang="en-US" sz="1600" u="none" strike="noStrike" dirty="0" err="1">
+                          <a:effectLst/>
+                        </a:rPr>
+                        <a:t>programme</a:t>
+                      </a:r>
+                      <a:r>
+                        <a:rPr lang="en-US" sz="1600" u="none" strike="noStrike" dirty="0">
+                          <a:effectLst/>
+                        </a:rPr>
+                        <a:t> / standard target cohort     ◐ selective, risk-based, endemic-area, outbreak/epidemic-indication or shared-decision </a:t>
+                      </a:r>
+                      <a:r>
+                        <a:rPr lang="en-US" sz="1600" u="none" strike="noStrike" dirty="0" err="1">
+                          <a:effectLst/>
+                        </a:rPr>
+                        <a:t>programme</a:t>
+                      </a:r>
+                      <a:r>
+                        <a:rPr lang="en-US" sz="1600" u="none" strike="noStrike" dirty="0">
+                          <a:effectLst/>
+                        </a:rPr>
+                        <a:t>     — not in a national public vaccination program</a:t>
+                      </a:r>
+                      <a:endParaRPr lang="en-US" sz="1600" b="0" i="0" u="none" strike="noStrike" dirty="0">
+                        <a:solidFill>
+                          <a:srgbClr val="333333"/>
+                        </a:solidFill>
+                        <a:effectLst/>
+                        <a:latin typeface="Carlito"/>
+                      </a:endParaRPr>
+                    </a:p>
+                  </a:txBody>
+                  <a:tcPr marL="5684" marR="5684" marT="5684" marB="0" anchor="ctr"/>
+                </a:tc>
+                <a:extLst>
+                  <a:ext uri="{0D108BD9-81ED-4DB2-BD59-A6C34878D82A}">
+                    <a16:rowId xmlns:a16="http://schemas.microsoft.com/office/drawing/2014/main" val="1003344334"/>
+                  </a:ext>
+                </a:extLst>
+              </a:tr>
+            </a:tbl>
+          </a:graphicData>
+        </a:graphic>
+      </p:graphicFrame>
     </p:spTree>
     <p:extLst>
       <p:ext uri="{BB962C8B-B14F-4D97-AF65-F5344CB8AC3E}">
